--- a/ОТЧЁТ ПО ПРОИЗВОДСТВЕННОЙ ПРАКТИКЕ.pptx
+++ b/ОТЧЁТ ПО ПРОИЗВОДСТВЕННОЙ ПРАКТИКЕ.pptx
@@ -118,6 +118,11 @@
       </a:defRPr>
     </a:lvl9pPr>
   </p:defaultTextStyle>
+  <p:extLst>
+    <p:ext uri="{EFAFB233-063F-42B5-8137-9DF3F51BA10A}">
+      <p15:sldGuideLst xmlns:p15="http://schemas.microsoft.com/office/powerpoint/2012/main"/>
+    </p:ext>
+  </p:extLst>
 </p:presentation>
 </file>
 
@@ -8919,6 +8924,292 @@
             </a:r>
           </a:p>
           <a:p>
+            <a:endParaRPr lang="ru-RU" dirty="0"/>
+          </a:p>
+        </p:txBody>
+      </p:sp>
+      <p:pic>
+        <p:nvPicPr>
+          <p:cNvPr id="4" name="Рисунок 3"/>
+          <p:cNvPicPr>
+            <a:picLocks noChangeAspect="1"/>
+          </p:cNvPicPr>
+          <p:nvPr/>
+        </p:nvPicPr>
+        <p:blipFill>
+          <a:blip r:embed="rId2">
+            <a:extLst>
+              <a:ext uri="{28A0092B-C50C-407E-A947-70E740481C1C}">
+                <a14:useLocalDpi xmlns:a14="http://schemas.microsoft.com/office/drawing/2010/main" val="0"/>
+              </a:ext>
+            </a:extLst>
+          </a:blip>
+          <a:stretch>
+            <a:fillRect/>
+          </a:stretch>
+        </p:blipFill>
+        <p:spPr>
+          <a:xfrm>
+            <a:off x="8571583" y="3598390"/>
+            <a:ext cx="3190103" cy="3190103"/>
+          </a:xfrm>
+          <a:prstGeom prst="rect">
+            <a:avLst/>
+          </a:prstGeom>
+        </p:spPr>
+      </p:pic>
+      <p:sp>
+        <p:nvSpPr>
+          <p:cNvPr id="5" name="Объект 2"/>
+          <p:cNvSpPr txBox="1">
+            <a:spLocks/>
+          </p:cNvSpPr>
+          <p:nvPr/>
+        </p:nvSpPr>
+        <p:spPr>
+          <a:xfrm>
+            <a:off x="8345401" y="3021482"/>
+            <a:ext cx="3642468" cy="647151"/>
+          </a:xfrm>
+          <a:prstGeom prst="rect">
+            <a:avLst/>
+          </a:prstGeom>
+        </p:spPr>
+        <p:txBody>
+          <a:bodyPr vert="horz" lIns="91440" tIns="45720" rIns="91440" bIns="45720" rtlCol="0">
+            <a:normAutofit/>
+          </a:bodyPr>
+          <a:lstStyle>
+            <a:lvl1pPr marL="342900" indent="-342900" algn="l" defTabSz="457200" rtl="0" eaLnBrk="1" latinLnBrk="0" hangingPunct="1">
+              <a:spcBef>
+                <a:spcPts val="1000"/>
+              </a:spcBef>
+              <a:spcAft>
+                <a:spcPts val="0"/>
+              </a:spcAft>
+              <a:buClr>
+                <a:schemeClr val="accent1"/>
+              </a:buClr>
+              <a:buFont typeface="Wingdings 3" charset="2"/>
+              <a:buChar char=""/>
+              <a:defRPr sz="1800" kern="1200">
+                <a:solidFill>
+                  <a:schemeClr val="tx1">
+                    <a:lumMod val="75000"/>
+                    <a:lumOff val="25000"/>
+                  </a:schemeClr>
+                </a:solidFill>
+                <a:latin typeface="+mn-lt"/>
+                <a:ea typeface="+mn-ea"/>
+                <a:cs typeface="+mn-cs"/>
+              </a:defRPr>
+            </a:lvl1pPr>
+            <a:lvl2pPr marL="742950" indent="-285750" algn="l" defTabSz="457200" rtl="0" eaLnBrk="1" latinLnBrk="0" hangingPunct="1">
+              <a:spcBef>
+                <a:spcPts val="1000"/>
+              </a:spcBef>
+              <a:spcAft>
+                <a:spcPts val="0"/>
+              </a:spcAft>
+              <a:buClr>
+                <a:schemeClr val="accent1"/>
+              </a:buClr>
+              <a:buFont typeface="Wingdings 3" charset="2"/>
+              <a:buChar char=""/>
+              <a:defRPr sz="1600" kern="1200">
+                <a:solidFill>
+                  <a:schemeClr val="tx1">
+                    <a:lumMod val="75000"/>
+                    <a:lumOff val="25000"/>
+                  </a:schemeClr>
+                </a:solidFill>
+                <a:latin typeface="+mn-lt"/>
+                <a:ea typeface="+mn-ea"/>
+                <a:cs typeface="+mn-cs"/>
+              </a:defRPr>
+            </a:lvl2pPr>
+            <a:lvl3pPr marL="1143000" indent="-228600" algn="l" defTabSz="457200" rtl="0" eaLnBrk="1" latinLnBrk="0" hangingPunct="1">
+              <a:spcBef>
+                <a:spcPts val="1000"/>
+              </a:spcBef>
+              <a:spcAft>
+                <a:spcPts val="0"/>
+              </a:spcAft>
+              <a:buClr>
+                <a:schemeClr val="accent1"/>
+              </a:buClr>
+              <a:buFont typeface="Wingdings 3" charset="2"/>
+              <a:buChar char=""/>
+              <a:defRPr sz="1400" kern="1200">
+                <a:solidFill>
+                  <a:schemeClr val="tx1">
+                    <a:lumMod val="75000"/>
+                    <a:lumOff val="25000"/>
+                  </a:schemeClr>
+                </a:solidFill>
+                <a:latin typeface="+mn-lt"/>
+                <a:ea typeface="+mn-ea"/>
+                <a:cs typeface="+mn-cs"/>
+              </a:defRPr>
+            </a:lvl3pPr>
+            <a:lvl4pPr marL="1600200" indent="-228600" algn="l" defTabSz="457200" rtl="0" eaLnBrk="1" latinLnBrk="0" hangingPunct="1">
+              <a:spcBef>
+                <a:spcPts val="1000"/>
+              </a:spcBef>
+              <a:spcAft>
+                <a:spcPts val="0"/>
+              </a:spcAft>
+              <a:buClr>
+                <a:schemeClr val="accent1"/>
+              </a:buClr>
+              <a:buFont typeface="Wingdings 3" charset="2"/>
+              <a:buChar char=""/>
+              <a:defRPr sz="1200" kern="1200">
+                <a:solidFill>
+                  <a:schemeClr val="tx1">
+                    <a:lumMod val="75000"/>
+                    <a:lumOff val="25000"/>
+                  </a:schemeClr>
+                </a:solidFill>
+                <a:latin typeface="+mn-lt"/>
+                <a:ea typeface="+mn-ea"/>
+                <a:cs typeface="+mn-cs"/>
+              </a:defRPr>
+            </a:lvl4pPr>
+            <a:lvl5pPr marL="2057400" indent="-228600" algn="l" defTabSz="457200" rtl="0" eaLnBrk="1" latinLnBrk="0" hangingPunct="1">
+              <a:spcBef>
+                <a:spcPts val="1000"/>
+              </a:spcBef>
+              <a:spcAft>
+                <a:spcPts val="0"/>
+              </a:spcAft>
+              <a:buClr>
+                <a:schemeClr val="accent1"/>
+              </a:buClr>
+              <a:buFont typeface="Wingdings 3" charset="2"/>
+              <a:buChar char=""/>
+              <a:defRPr sz="1200" kern="1200">
+                <a:solidFill>
+                  <a:schemeClr val="tx1">
+                    <a:lumMod val="75000"/>
+                    <a:lumOff val="25000"/>
+                  </a:schemeClr>
+                </a:solidFill>
+                <a:latin typeface="+mn-lt"/>
+                <a:ea typeface="+mn-ea"/>
+                <a:cs typeface="+mn-cs"/>
+              </a:defRPr>
+            </a:lvl5pPr>
+            <a:lvl6pPr marL="2514600" indent="-228600" algn="l" defTabSz="457200" rtl="0" eaLnBrk="1" latinLnBrk="0" hangingPunct="1">
+              <a:spcBef>
+                <a:spcPts val="1000"/>
+              </a:spcBef>
+              <a:spcAft>
+                <a:spcPts val="0"/>
+              </a:spcAft>
+              <a:buClr>
+                <a:schemeClr val="accent1"/>
+              </a:buClr>
+              <a:buFont typeface="Wingdings 3" charset="2"/>
+              <a:buChar char=""/>
+              <a:defRPr sz="1200" kern="1200">
+                <a:solidFill>
+                  <a:schemeClr val="tx1">
+                    <a:lumMod val="75000"/>
+                    <a:lumOff val="25000"/>
+                  </a:schemeClr>
+                </a:solidFill>
+                <a:latin typeface="+mn-lt"/>
+                <a:ea typeface="+mn-ea"/>
+                <a:cs typeface="+mn-cs"/>
+              </a:defRPr>
+            </a:lvl6pPr>
+            <a:lvl7pPr marL="2971800" indent="-228600" algn="l" defTabSz="457200" rtl="0" eaLnBrk="1" latinLnBrk="0" hangingPunct="1">
+              <a:spcBef>
+                <a:spcPts val="1000"/>
+              </a:spcBef>
+              <a:spcAft>
+                <a:spcPts val="0"/>
+              </a:spcAft>
+              <a:buClr>
+                <a:schemeClr val="accent1"/>
+              </a:buClr>
+              <a:buFont typeface="Wingdings 3" charset="2"/>
+              <a:buChar char=""/>
+              <a:defRPr sz="1200" kern="1200">
+                <a:solidFill>
+                  <a:schemeClr val="tx1">
+                    <a:lumMod val="75000"/>
+                    <a:lumOff val="25000"/>
+                  </a:schemeClr>
+                </a:solidFill>
+                <a:latin typeface="+mn-lt"/>
+                <a:ea typeface="+mn-ea"/>
+                <a:cs typeface="+mn-cs"/>
+              </a:defRPr>
+            </a:lvl7pPr>
+            <a:lvl8pPr marL="3429000" indent="-228600" algn="l" defTabSz="457200" rtl="0" eaLnBrk="1" latinLnBrk="0" hangingPunct="1">
+              <a:spcBef>
+                <a:spcPts val="1000"/>
+              </a:spcBef>
+              <a:spcAft>
+                <a:spcPts val="0"/>
+              </a:spcAft>
+              <a:buClr>
+                <a:schemeClr val="accent1"/>
+              </a:buClr>
+              <a:buFont typeface="Wingdings 3" charset="2"/>
+              <a:buChar char=""/>
+              <a:defRPr sz="1200" kern="1200">
+                <a:solidFill>
+                  <a:schemeClr val="tx1">
+                    <a:lumMod val="75000"/>
+                    <a:lumOff val="25000"/>
+                  </a:schemeClr>
+                </a:solidFill>
+                <a:latin typeface="+mn-lt"/>
+                <a:ea typeface="+mn-ea"/>
+                <a:cs typeface="+mn-cs"/>
+              </a:defRPr>
+            </a:lvl8pPr>
+            <a:lvl9pPr marL="3886200" indent="-228600" algn="l" defTabSz="457200" rtl="0" eaLnBrk="1" latinLnBrk="0" hangingPunct="1">
+              <a:spcBef>
+                <a:spcPts val="1000"/>
+              </a:spcBef>
+              <a:spcAft>
+                <a:spcPts val="0"/>
+              </a:spcAft>
+              <a:buClr>
+                <a:schemeClr val="accent1"/>
+              </a:buClr>
+              <a:buFont typeface="Wingdings 3" charset="2"/>
+              <a:buChar char=""/>
+              <a:defRPr sz="1200" kern="1200">
+                <a:solidFill>
+                  <a:schemeClr val="tx1">
+                    <a:lumMod val="75000"/>
+                    <a:lumOff val="25000"/>
+                  </a:schemeClr>
+                </a:solidFill>
+                <a:latin typeface="+mn-lt"/>
+                <a:ea typeface="+mn-ea"/>
+                <a:cs typeface="+mn-cs"/>
+              </a:defRPr>
+            </a:lvl9pPr>
+          </a:lstStyle>
+          <a:p>
+            <a:r>
+              <a:rPr lang="ru-RU" b="1" dirty="0" smtClean="0"/>
+              <a:t>Ссылка на </a:t>
+            </a:r>
+            <a:r>
+              <a:rPr lang="ru-RU" b="1" dirty="0" err="1" smtClean="0"/>
+              <a:t>репрозиторий</a:t>
+            </a:r>
+            <a:r>
+              <a:rPr lang="ru-RU" b="1" dirty="0" smtClean="0"/>
+              <a:t> </a:t>
+            </a:r>
             <a:endParaRPr lang="ru-RU" dirty="0"/>
           </a:p>
         </p:txBody>
